--- a/curriculum-planner/output/slides/session_04_slides.pptx
+++ b/curriculum-planner/output/slides/session_04_slides.pptx
@@ -3177,7 +3177,7 @@
           <a:lstStyle/>
           <a:p>
             <a:r>
-              <a:t>Activity: Delivery: Incorporate feedback. Rehearse team presentation.max per team, timer enforced.</a:t>
+              <a:t>Activity: Portfolio Assembly  |✆</a:t>
             </a:r>
           </a:p>
         </p:txBody>
@@ -3198,7 +3198,7 @@
           <a:lstStyle/>
           <a:p>
             <a:r>
-              <a:t>Duration: 5 min</a:t>
+              <a:t>Duration: 30 min</a:t>
             </a:r>
           </a:p>
           <a:p>
@@ -3242,7 +3242,7 @@
           <a:lstStyle/>
           <a:p>
             <a:r>
-              <a:t>Activity: Lunch</a:t>
+              <a:t>Activity: Before &amp; After Documentation  |✆</a:t>
             </a:r>
           </a:p>
         </p:txBody>
@@ -3263,12 +3263,24 @@
           <a:lstStyle/>
           <a:p>
             <a:r>
-              <a:t>Duration: 60 min</a:t>
+              <a:t>Duration: 40 min</a:t>
             </a:r>
           </a:p>
           <a:p>
             <a:r>
               <a:t>Format: Whole Class</a:t>
+            </a:r>
+          </a:p>
+          <a:p>
+            <a:pPr lvl="1"/>
+            <a:r>
+              <a:t>Delivery: 300-word reflection in English: what…</a:t>
+            </a:r>
+          </a:p>
+          <a:p>
+            <a:pPr lvl="1"/>
+            <a:r>
+              <a:t>Compare Day 1 Data Brief (3…</a:t>
             </a:r>
           </a:p>
         </p:txBody>
@@ -3307,7 +3319,7 @@
           <a:lstStyle/>
           <a:p>
             <a:r>
-              <a:t>Activity: Portfolio Assembly  |✆</a:t>
+              <a:t>Activity: Break</a:t>
             </a:r>
           </a:p>
         </p:txBody>
@@ -3328,7 +3340,7 @@
           <a:lstStyle/>
           <a:p>
             <a:r>
-              <a:t>Duration: 30 min</a:t>
+              <a:t>Duration: 15 min</a:t>
             </a:r>
           </a:p>
           <a:p>
@@ -3372,7 +3384,7 @@
           <a:lstStyle/>
           <a:p>
             <a:r>
-              <a:t>Activity: Before &amp; After Documentation  |✆</a:t>
+              <a:t>Activity: Capstone Showcase</a:t>
             </a:r>
           </a:p>
         </p:txBody>
@@ -3393,7 +3405,7 @@
           <a:lstStyle/>
           <a:p>
             <a:r>
-              <a:t>Duration: 40 min</a:t>
+              <a:t>Duration: 95 min</a:t>
             </a:r>
           </a:p>
           <a:p>
@@ -3404,13 +3416,31 @@
           <a:p>
             <a:pPr lvl="1"/>
             <a:r>
-              <a:t>Delivery: 300-word reflection in English: what…</a:t>
+              <a:t>Format: Team presentations + Q&amp;A to…</a:t>
             </a:r>
           </a:p>
           <a:p>
             <a:pPr lvl="1"/>
             <a:r>
-              <a:t>Compare Day 1 Data Brief (3…</a:t>
+              <a:t>Bloom’s: Create + Evaluate Delivery: Each…</a:t>
+            </a:r>
+          </a:p>
+          <a:p>
+            <a:pPr lvl="1"/>
+            <a:r>
+              <a:t>Invite real guests: team leads, finance…</a:t>
+            </a:r>
+          </a:p>
+          <a:p>
+            <a:pPr lvl="1"/>
+            <a:r>
+              <a:t>Real questions about methodology, conclusions, recommendations</a:t>
+            </a:r>
+          </a:p>
+          <a:p>
+            <a:pPr lvl="1"/>
+            <a:r>
+              <a:t>In English</a:t>
             </a:r>
           </a:p>
         </p:txBody>
@@ -3449,7 +3479,7 @@
           <a:lstStyle/>
           <a:p>
             <a:r>
-              <a:t>Activity: Break</a:t>
+              <a:t>Activity: “What’s Next”</a:t>
             </a:r>
           </a:p>
         </p:txBody>
@@ -3476,6 +3506,18 @@
           <a:p>
             <a:r>
               <a:t>Format: Whole Class</a:t>
+            </a:r>
+          </a:p>
+          <a:p>
+            <a:pPr lvl="1"/>
+            <a:r>
+              <a:t>Delivery: 3 commitments: one data question…</a:t>
+            </a:r>
+          </a:p>
+          <a:p>
+            <a:pPr lvl="1"/>
+            <a:r>
+              <a:t>Share with accountability partner</a:t>
             </a:r>
           </a:p>
         </p:txBody>
@@ -3514,7 +3556,7 @@
           <a:lstStyle/>
           <a:p>
             <a:r>
-              <a:t>Activity: Capstone Showcase</a:t>
+              <a:t>Activity: Final Self-Assessment + Retrospective</a:t>
             </a:r>
           </a:p>
         </p:txBody>
@@ -3535,7 +3577,7 @@
           <a:lstStyle/>
           <a:p>
             <a:r>
-              <a:t>Duration: 95 min</a:t>
+              <a:t>Duration: 20 min</a:t>
             </a:r>
           </a:p>
           <a:p>
@@ -3546,31 +3588,19 @@
           <a:p>
             <a:pPr lvl="1"/>
             <a:r>
-              <a:t>Format: Team presentations + Q&amp;A to…</a:t>
+              <a:t>Delivery: Data confidence rating (1–5 across…</a:t>
             </a:r>
           </a:p>
           <a:p>
             <a:pPr lvl="1"/>
             <a:r>
-              <a:t>Bloom’s: Create + Evaluate Delivery: Each…</a:t>
+              <a:t>Compare Day 1 → Day 4</a:t>
             </a:r>
           </a:p>
           <a:p>
             <a:pPr lvl="1"/>
             <a:r>
-              <a:t>Invite real guests: team leads, finance…</a:t>
-            </a:r>
-          </a:p>
-          <a:p>
-            <a:pPr lvl="1"/>
-            <a:r>
-              <a:t>Real questions about methodology, conclusions, recommendations</a:t>
-            </a:r>
-          </a:p>
-          <a:p>
-            <a:pPr lvl="1"/>
-            <a:r>
-              <a:t>In English</a:t>
+              <a:t>Retrospective: what changed about how you…</a:t>
             </a:r>
           </a:p>
         </p:txBody>
@@ -3609,7 +3639,7 @@
           <a:lstStyle/>
           <a:p>
             <a:r>
-              <a:t>Activity: “What’s Next”</a:t>
+              <a:t>Activity: Certificates + Close</a:t>
             </a:r>
           </a:p>
         </p:txBody>
@@ -3630,7 +3660,7 @@
           <a:lstStyle/>
           <a:p>
             <a:r>
-              <a:t>Duration: 15 min</a:t>
+              <a:t>Duration: 10 min</a:t>
             </a:r>
           </a:p>
           <a:p>
@@ -3641,13 +3671,31 @@
           <a:p>
             <a:pPr lvl="1"/>
             <a:r>
-              <a:t>Delivery: 3 commitments: one data question…</a:t>
+              <a:t>Delivery: Certificates</a:t>
             </a:r>
           </a:p>
           <a:p>
             <a:pPr lvl="1"/>
             <a:r>
-              <a:t>Share with accountability partner</a:t>
+              <a:t>Group photo</a:t>
+            </a:r>
+          </a:p>
+          <a:p>
+            <a:pPr lvl="1"/>
+            <a:r>
+              <a:t>Alumni community setup—cross-country network for monthly…</a:t>
+            </a:r>
+          </a:p>
+          <a:p>
+            <a:pPr lvl="1"/>
+            <a:r>
+              <a:t>Introduce 90-day retention plan with monthly…</a:t>
+            </a:r>
+          </a:p>
+          <a:p>
+            <a:pPr lvl="1"/>
+            <a:r>
+              <a:t>Delivery: Final retrieval challenge</a:t>
             </a:r>
           </a:p>
         </p:txBody>
@@ -3712,7 +3760,7 @@
           </a:p>
           <a:p>
             <a:r>
-              <a:t>Can you demonstrate: Session 4 Contribution?</a:t>
+              <a:t>Can you demonstrate: Present a complete data analysis to a real audience with confidence in English (LO #7)?</a:t>
             </a:r>
           </a:p>
         </p:txBody>
@@ -3844,37 +3892,31 @@
           <a:lstStyle/>
           <a:p>
             <a:r>
-              <a:t>SWBAT: Session 4 Contribution</a:t>
+              <a:t>SWBAT: Present a complete data analysis…</a:t>
             </a:r>
           </a:p>
           <a:p>
             <a:pPr/>
             <a:r>
-              <a:t>SWBAT: By the end of Session…</a:t>
+              <a:t>SWBAT: Defend methodology and conclusions under…</a:t>
             </a:r>
           </a:p>
           <a:p>
             <a:pPr/>
             <a:r>
-              <a:t>SWBAT: Present a complete data analysis…</a:t>
+              <a:t>SWBAT: Assemble a professional data portfolio…</a:t>
             </a:r>
           </a:p>
           <a:p>
             <a:pPr/>
             <a:r>
-              <a:t>SWBAT: Defend methodology and conclusions under…</a:t>
+              <a:t>SWBAT: Articulate their data literacy growth…</a:t>
             </a:r>
           </a:p>
           <a:p>
             <a:pPr/>
             <a:r>
-              <a:t>SWBAT: Assemble a professional data portfolio…</a:t>
-            </a:r>
-          </a:p>
-          <a:p>
-            <a:pPr/>
-            <a:r>
-              <a:t>SWBAT: Articulate their data literacy growth…</a:t>
+              <a:t>SWBAT: Position data skills professionally on…</a:t>
             </a:r>
           </a:p>
         </p:txBody>
@@ -3978,7 +4020,7 @@
           <a:lstStyle/>
           <a:p>
             <a:r>
-              <a:t>Activity: Delivery: Final retrieval challenge. Full analysis: pivot table, chart, 3-sentence English brief in. Compare to Days 2 and 3. Growth should be visible.</a:t>
+              <a:t>Activity: Capstone Build Sprint</a:t>
             </a:r>
           </a:p>
         </p:txBody>
@@ -3999,12 +4041,30 @@
           <a:lstStyle/>
           <a:p>
             <a:r>
-              <a:t>Duration: 10 min</a:t>
+              <a:t>Duration: 60 min</a:t>
             </a:r>
           </a:p>
           <a:p>
             <a:r>
               <a:t>Format: Whole Class</a:t>
+            </a:r>
+          </a:p>
+          <a:p>
+            <a:pPr lvl="1"/>
+            <a:r>
+              <a:t>Delivery: Protected build time</a:t>
+            </a:r>
+          </a:p>
+          <a:p>
+            <a:pPr lvl="1"/>
+            <a:r>
+              <a:t>Instructor rotates 1-on-1: analysis quality, dashboard…</a:t>
+            </a:r>
+          </a:p>
+          <a:p>
+            <a:pPr lvl="1"/>
+            <a:r>
+              <a:t>Triage students who are behind: help…</a:t>
             </a:r>
           </a:p>
         </p:txBody>
@@ -4043,7 +4103,7 @@
           <a:lstStyle/>
           <a:p>
             <a:r>
-              <a:t>Activity: Capstone Build Sprint</a:t>
+              <a:t>Activity: “Data for Your LinkedIn”</a:t>
             </a:r>
           </a:p>
         </p:txBody>
@@ -4064,7 +4124,7 @@
           <a:lstStyle/>
           <a:p>
             <a:r>
-              <a:t>Duration: 60 min</a:t>
+              <a:t>Duration: 30 min</a:t>
             </a:r>
           </a:p>
           <a:p>
@@ -4075,19 +4135,13 @@
           <a:p>
             <a:pPr lvl="1"/>
             <a:r>
-              <a:t>Delivery: Protected build time</a:t>
+              <a:t>Delivery: How to position data literacy…</a:t>
             </a:r>
           </a:p>
           <a:p>
             <a:pPr lvl="1"/>
             <a:r>
-              <a:t>Instructor rotates 1-on-1: analysis quality, dashboard…</a:t>
-            </a:r>
-          </a:p>
-          <a:p>
-            <a:pPr lvl="1"/>
-            <a:r>
-              <a:t>Triage students who are behind: help…</a:t>
+              <a:t>Students rewrite LinkedIn summary to include…</a:t>
             </a:r>
           </a:p>
         </p:txBody>
@@ -4126,7 +4180,7 @@
           <a:lstStyle/>
           <a:p>
             <a:r>
-              <a:t>Activity: “Data for Your LinkedIn”</a:t>
+              <a:t>Activity: Break</a:t>
             </a:r>
           </a:p>
         </p:txBody>
@@ -4147,24 +4201,12 @@
           <a:lstStyle/>
           <a:p>
             <a:r>
-              <a:t>Duration: 30 min</a:t>
+              <a:t>Duration: 15 min</a:t>
             </a:r>
           </a:p>
           <a:p>
             <a:r>
               <a:t>Format: Whole Class</a:t>
-            </a:r>
-          </a:p>
-          <a:p>
-            <a:pPr lvl="1"/>
-            <a:r>
-              <a:t>Delivery: How to position data literacy…</a:t>
-            </a:r>
-          </a:p>
-          <a:p>
-            <a:pPr lvl="1"/>
-            <a:r>
-              <a:t>Students rewrite LinkedIn summary to include…</a:t>
             </a:r>
           </a:p>
         </p:txBody>
@@ -4203,7 +4245,7 @@
           <a:lstStyle/>
           <a:p>
             <a:r>
-              <a:t>Activity: Break</a:t>
+              <a:t>Activity: Structured Peer Review</a:t>
             </a:r>
           </a:p>
         </p:txBody>
@@ -4224,12 +4266,18 @@
           <a:lstStyle/>
           <a:p>
             <a:r>
-              <a:t>Duration: 15 min</a:t>
+              <a:t>Duration: 30 min</a:t>
             </a:r>
           </a:p>
           <a:p>
             <a:r>
               <a:t>Format: Whole Class</a:t>
+            </a:r>
+          </a:p>
+          <a:p>
+            <a:pPr lvl="1"/>
+            <a:r>
+              <a:t>Delivery: Rubric separates 3 dimensions: analytical…</a:t>
             </a:r>
           </a:p>
         </p:txBody>
@@ -4268,7 +4316,7 @@
           <a:lstStyle/>
           <a:p>
             <a:r>
-              <a:t>Activity: Structured Peer Review</a:t>
+              <a:t>Activity: Final Polish</a:t>
             </a:r>
           </a:p>
         </p:txBody>
@@ -4295,12 +4343,6 @@
           <a:p>
             <a:r>
               <a:t>Format: Whole Class</a:t>
-            </a:r>
-          </a:p>
-          <a:p>
-            <a:pPr lvl="1"/>
-            <a:r>
-              <a:t>Delivery: Rubric separates 3 dimensions: analytical…</a:t>
             </a:r>
           </a:p>
         </p:txBody>
@@ -4339,7 +4381,7 @@
           <a:lstStyle/>
           <a:p>
             <a:r>
-              <a:t>Activity: Final Polish</a:t>
+              <a:t>Activity: Lunch</a:t>
             </a:r>
           </a:p>
         </p:txBody>
@@ -4360,7 +4402,7 @@
           <a:lstStyle/>
           <a:p>
             <a:r>
-              <a:t>Duration: 30 min</a:t>
+              <a:t>Duration: 60 min</a:t>
             </a:r>
           </a:p>
           <a:p>
